--- a/Documentation/c++PPT.pptx
+++ b/Documentation/c++PPT.pptx
@@ -2,18 +2,18 @@
 <file path=ppt/presentation.xml><?xml version="1.0" encoding="utf-8"?>
 <p:presentation xmlns:a="http://schemas.openxmlformats.org/drawingml/2006/main" xmlns:r="http://schemas.openxmlformats.org/officeDocument/2006/relationships" xmlns:mc="http://schemas.openxmlformats.org/markup-compatibility/2006" xmlns:mv="urn:schemas-microsoft-com:mac:vml" xmlns:p="http://schemas.openxmlformats.org/presentationml/2006/main" xmlns:c="http://schemas.openxmlformats.org/drawingml/2006/chart" xmlns:dgm="http://schemas.openxmlformats.org/drawingml/2006/diagram" xmlns:o="urn:schemas-microsoft-com:office:office" xmlns:v="urn:schemas-microsoft-com:vml" xmlns:pvml="urn:schemas-microsoft-com:office:powerpoint" xmlns:com="http://schemas.openxmlformats.org/drawingml/2006/compatibility" xmlns:p14="http://schemas.microsoft.com/office/powerpoint/2010/main" xmlns:p15="http://schemas.microsoft.com/office/powerpoint/2012/main" xmlns:ahyp="http://schemas.microsoft.com/office/drawing/2018/hyperlinkcolor" autoCompressPictures="0" strictFirstAndLastChars="0" saveSubsetFonts="1">
   <p:sldMasterIdLst>
-    <p:sldMasterId id="2147483659" r:id="rId4"/>
+    <p:sldMasterId id="2147483659" r:id="rId3"/>
   </p:sldMasterIdLst>
   <p:notesMasterIdLst>
-    <p:notesMasterId r:id="rId5"/>
+    <p:notesMasterId r:id="rId4"/>
   </p:notesMasterIdLst>
   <p:sldIdLst>
-    <p:sldId id="256" r:id="rId6"/>
-    <p:sldId id="257" r:id="rId7"/>
-    <p:sldId id="258" r:id="rId8"/>
-    <p:sldId id="259" r:id="rId9"/>
-    <p:sldId id="260" r:id="rId10"/>
-    <p:sldId id="261" r:id="rId11"/>
+    <p:sldId id="256" r:id="rId5"/>
+    <p:sldId id="257" r:id="rId6"/>
+    <p:sldId id="258" r:id="rId7"/>
+    <p:sldId id="259" r:id="rId8"/>
+    <p:sldId id="260" r:id="rId9"/>
+    <p:sldId id="261" r:id="rId10"/>
   </p:sldIdLst>
   <p:sldSz cy="5143500" cx="9144000"/>
   <p:notesSz cx="6858000" cy="9144000"/>
@@ -246,22 +246,6 @@
       </a:defRPr>
     </a:lvl9pPr>
   </p:defaultTextStyle>
-  <p:extLst>
-    <p:ext uri="{EFAFB233-063F-42B5-8137-9DF3F51BA10A}">
-      <p15:sldGuideLst>
-        <p15:guide id="1" orient="horz" pos="1620">
-          <p15:clr>
-            <a:srgbClr val="747775"/>
-          </p15:clr>
-        </p15:guide>
-        <p15:guide id="2" pos="2880">
-          <p15:clr>
-            <a:srgbClr val="747775"/>
-          </p15:clr>
-        </p15:guide>
-      </p15:sldGuideLst>
-    </p:ext>
-  </p:extLst>
 </p:presentation>
 </file>
 
@@ -6162,35 +6146,35 @@
           </a:bodyPr>
           <a:lstStyle/>
           <a:p>
-            <a:pPr indent="-342900" lvl="0" marL="457200" rtl="0" algn="l">
+            <a:pPr indent="-349250" lvl="0" marL="457200" rtl="0" algn="l">
               <a:lnSpc>
                 <a:spcPct val="150000"/>
               </a:lnSpc>
               <a:spcBef>
-                <a:spcPts val="0"/>
-              </a:spcBef>
-              <a:spcAft>
-                <a:spcPts val="0"/>
-              </a:spcAft>
-              <a:buSzPts val="1800"/>
+                <a:spcPts val="1200"/>
+              </a:spcBef>
+              <a:spcAft>
+                <a:spcPts val="0"/>
+              </a:spcAft>
+              <a:buSzPts val="1900"/>
               <a:buChar char="●"/>
             </a:pPr>
             <a:r>
-              <a:rPr lang="en-GB">
+              <a:rPr lang="en-GB" sz="1900">
                 <a:solidFill>
                   <a:schemeClr val="dk1"/>
                 </a:solidFill>
               </a:rPr>
-              <a:t>Manual timetable creation can lead to class clashes and poor scheduling.</a:t>
+              <a:t>Manual timetable creation can lead to class clashes and inefficient scheduling.</a:t>
             </a:r>
-            <a:endParaRPr>
+            <a:endParaRPr sz="1900">
               <a:solidFill>
                 <a:schemeClr val="dk1"/>
               </a:solidFill>
             </a:endParaRPr>
           </a:p>
           <a:p>
-            <a:pPr indent="-342900" lvl="0" marL="457200" rtl="0" algn="l">
+            <a:pPr indent="-349250" lvl="0" marL="457200" rtl="0" algn="l">
               <a:lnSpc>
                 <a:spcPct val="150000"/>
               </a:lnSpc>
@@ -6200,25 +6184,25 @@
               <a:spcAft>
                 <a:spcPts val="0"/>
               </a:spcAft>
-              <a:buSzPts val="1800"/>
+              <a:buSzPts val="1900"/>
               <a:buChar char="●"/>
             </a:pPr>
             <a:r>
-              <a:rPr lang="en-GB">
+              <a:rPr lang="en-GB" sz="1900">
                 <a:solidFill>
                   <a:schemeClr val="dk1"/>
                 </a:solidFill>
               </a:rPr>
-              <a:t>Faculty workload may become uneven.</a:t>
+              <a:t>Faculty workload can become uneven if lectures are not distributed properly.</a:t>
             </a:r>
-            <a:endParaRPr>
+            <a:endParaRPr sz="1900">
               <a:solidFill>
                 <a:schemeClr val="dk1"/>
               </a:solidFill>
             </a:endParaRPr>
           </a:p>
           <a:p>
-            <a:pPr indent="-342900" lvl="0" marL="457200" rtl="0" algn="l">
+            <a:pPr indent="-349250" lvl="0" marL="457200" rtl="0" algn="l">
               <a:lnSpc>
                 <a:spcPct val="150000"/>
               </a:lnSpc>
@@ -6228,25 +6212,25 @@
               <a:spcAft>
                 <a:spcPts val="0"/>
               </a:spcAft>
-              <a:buSzPts val="1800"/>
+              <a:buSzPts val="1900"/>
               <a:buChar char="●"/>
             </a:pPr>
             <a:r>
-              <a:rPr lang="en-GB">
+              <a:rPr lang="en-GB" sz="1900">
                 <a:solidFill>
                   <a:schemeClr val="dk1"/>
                 </a:solidFill>
               </a:rPr>
-              <a:t>It takes time and effort to organize schedules manually.</a:t>
+              <a:t>Organizing weekly schedules manually takes time and effort.</a:t>
             </a:r>
-            <a:endParaRPr>
+            <a:endParaRPr sz="1900">
               <a:solidFill>
                 <a:schemeClr val="dk1"/>
               </a:solidFill>
             </a:endParaRPr>
           </a:p>
           <a:p>
-            <a:pPr indent="-342900" lvl="0" marL="457200" rtl="0" algn="l">
+            <a:pPr indent="-349250" lvl="0" marL="457200" rtl="0" algn="l">
               <a:lnSpc>
                 <a:spcPct val="150000"/>
               </a:lnSpc>
@@ -6256,18 +6240,18 @@
               <a:spcAft>
                 <a:spcPts val="0"/>
               </a:spcAft>
-              <a:buSzPts val="1800"/>
+              <a:buSzPts val="1900"/>
               <a:buChar char="●"/>
             </a:pPr>
             <a:r>
-              <a:rPr lang="en-GB">
+              <a:rPr lang="en-GB" sz="1900">
                 <a:solidFill>
                   <a:schemeClr val="dk1"/>
                 </a:solidFill>
               </a:rPr>
-              <a:t>The goal is to automatically generate a simple weekly timetable.</a:t>
+              <a:t>The goal is to automatically generate a simple timetable showing both courses and faculty.</a:t>
             </a:r>
-            <a:endParaRPr>
+            <a:endParaRPr sz="1900">
               <a:solidFill>
                 <a:schemeClr val="dk1"/>
               </a:solidFill>
@@ -6399,7 +6383,7 @@
           </a:bodyPr>
           <a:lstStyle/>
           <a:p>
-            <a:pPr indent="-342900" lvl="0" marL="457200" rtl="0" algn="l">
+            <a:pPr indent="-349250" lvl="0" marL="457200" rtl="0" algn="l">
               <a:lnSpc>
                 <a:spcPct val="150000"/>
               </a:lnSpc>
@@ -6409,25 +6393,25 @@
               <a:spcAft>
                 <a:spcPts val="0"/>
               </a:spcAft>
-              <a:buSzPts val="1800"/>
+              <a:buSzPts val="1900"/>
               <a:buChar char="●"/>
             </a:pPr>
             <a:r>
-              <a:rPr lang="en-GB">
+              <a:rPr lang="en-GB" sz="1900">
                 <a:solidFill>
                   <a:schemeClr val="dk1"/>
                 </a:solidFill>
               </a:rPr>
-              <a:t>Developed a C++ program to generate a timetable.</a:t>
+              <a:t>Developed a C++ program to automatically generate a weekly timetable.</a:t>
             </a:r>
-            <a:endParaRPr>
+            <a:endParaRPr sz="1900">
               <a:solidFill>
                 <a:schemeClr val="dk1"/>
               </a:solidFill>
             </a:endParaRPr>
           </a:p>
           <a:p>
-            <a:pPr indent="-342900" lvl="0" marL="457200" rtl="0" algn="l">
+            <a:pPr indent="-349250" lvl="0" marL="457200" rtl="0" algn="l">
               <a:lnSpc>
                 <a:spcPct val="150000"/>
               </a:lnSpc>
@@ -6437,25 +6421,25 @@
               <a:spcAft>
                 <a:spcPts val="0"/>
               </a:spcAft>
-              <a:buSzPts val="1800"/>
+              <a:buSzPts val="1900"/>
               <a:buChar char="●"/>
             </a:pPr>
             <a:r>
-              <a:rPr lang="en-GB">
+              <a:rPr lang="en-GB" sz="1900">
                 <a:solidFill>
                   <a:schemeClr val="dk1"/>
                 </a:solidFill>
               </a:rPr>
-              <a:t>User enters course name and faculty name.</a:t>
+              <a:t>User enters course names and corresponding faculty names.</a:t>
             </a:r>
-            <a:endParaRPr>
+            <a:endParaRPr sz="1900">
               <a:solidFill>
                 <a:schemeClr val="dk1"/>
               </a:solidFill>
             </a:endParaRPr>
           </a:p>
           <a:p>
-            <a:pPr indent="-342900" lvl="0" marL="457200" rtl="0" algn="l">
+            <a:pPr indent="-349250" lvl="0" marL="457200" rtl="0" algn="l">
               <a:lnSpc>
                 <a:spcPct val="150000"/>
               </a:lnSpc>
@@ -6465,25 +6449,25 @@
               <a:spcAft>
                 <a:spcPts val="0"/>
               </a:spcAft>
-              <a:buSzPts val="1800"/>
+              <a:buSzPts val="1900"/>
               <a:buChar char="●"/>
             </a:pPr>
             <a:r>
-              <a:rPr lang="en-GB">
+              <a:rPr lang="en-GB" sz="1900">
                 <a:solidFill>
                   <a:schemeClr val="dk1"/>
                 </a:solidFill>
               </a:rPr>
-              <a:t>System automatically assigns courses to available time slots.</a:t>
+              <a:t>The program stores courses and faculty using arrays.</a:t>
             </a:r>
-            <a:endParaRPr>
+            <a:endParaRPr sz="1900">
               <a:solidFill>
                 <a:schemeClr val="dk1"/>
               </a:solidFill>
             </a:endParaRPr>
           </a:p>
           <a:p>
-            <a:pPr indent="-342900" lvl="0" marL="457200" rtl="0" algn="l">
+            <a:pPr indent="-349250" lvl="0" marL="457200" rtl="0" algn="l">
               <a:lnSpc>
                 <a:spcPct val="150000"/>
               </a:lnSpc>
@@ -6493,18 +6477,18 @@
               <a:spcAft>
                 <a:spcPts val="0"/>
               </a:spcAft>
-              <a:buSzPts val="1800"/>
+              <a:buSzPts val="1900"/>
               <a:buChar char="●"/>
             </a:pPr>
             <a:r>
-              <a:rPr lang="en-GB">
+              <a:rPr lang="en-GB" sz="1900">
                 <a:solidFill>
                   <a:schemeClr val="dk1"/>
                 </a:solidFill>
               </a:rPr>
-              <a:t>Includes a fixed break period in the schedule.</a:t>
+              <a:t>Lectures are automatically assigned to available time slots with a fixed break.</a:t>
             </a:r>
-            <a:endParaRPr>
+            <a:endParaRPr sz="1900">
               <a:solidFill>
                 <a:schemeClr val="dk1"/>
               </a:solidFill>
@@ -6636,7 +6620,10 @@
           </a:bodyPr>
           <a:lstStyle/>
           <a:p>
-            <a:pPr indent="-342900" lvl="0" marL="457200" rtl="0" algn="l">
+            <a:pPr indent="-349250" lvl="0" marL="457200" rtl="0" algn="l">
+              <a:lnSpc>
+                <a:spcPct val="150000"/>
+              </a:lnSpc>
               <a:spcBef>
                 <a:spcPts val="0"/>
               </a:spcBef>
@@ -6646,25 +6633,28 @@
               <a:buClr>
                 <a:schemeClr val="dk1"/>
               </a:buClr>
-              <a:buSzPts val="1800"/>
+              <a:buSzPts val="1900"/>
               <a:buChar char="●"/>
             </a:pPr>
             <a:r>
-              <a:rPr lang="en-GB">
+              <a:rPr lang="en-GB" sz="1900">
                 <a:solidFill>
                   <a:schemeClr val="dk1"/>
                 </a:solidFill>
               </a:rPr>
-              <a:t>Program uses structures to store course details.</a:t>
+              <a:t>Program uses arrays to store course names and faculty names.</a:t>
             </a:r>
-            <a:endParaRPr>
+            <a:endParaRPr sz="1900">
               <a:solidFill>
                 <a:schemeClr val="dk1"/>
               </a:solidFill>
             </a:endParaRPr>
           </a:p>
           <a:p>
-            <a:pPr indent="-342900" lvl="0" marL="457200" rtl="0" algn="l">
+            <a:pPr indent="-349250" lvl="0" marL="457200" rtl="0" algn="l">
+              <a:lnSpc>
+                <a:spcPct val="150000"/>
+              </a:lnSpc>
               <a:spcBef>
                 <a:spcPts val="0"/>
               </a:spcBef>
@@ -6674,25 +6664,28 @@
               <a:buClr>
                 <a:schemeClr val="dk1"/>
               </a:buClr>
-              <a:buSzPts val="1800"/>
+              <a:buSzPts val="1900"/>
               <a:buChar char="●"/>
             </a:pPr>
             <a:r>
-              <a:rPr lang="en-GB">
+              <a:rPr lang="en-GB" sz="1900">
                 <a:solidFill>
                   <a:schemeClr val="dk1"/>
                 </a:solidFill>
               </a:rPr>
-              <a:t>A 5×5 array represents the weekly timetable.</a:t>
+              <a:t>Two 5×5 matrices represent the timetable (courses and faculty).</a:t>
             </a:r>
-            <a:endParaRPr>
+            <a:endParaRPr sz="1900">
               <a:solidFill>
                 <a:schemeClr val="dk1"/>
               </a:solidFill>
             </a:endParaRPr>
           </a:p>
           <a:p>
-            <a:pPr indent="-342900" lvl="0" marL="457200" rtl="0" algn="l">
+            <a:pPr indent="-349250" lvl="0" marL="457200" rtl="0" algn="l">
+              <a:lnSpc>
+                <a:spcPct val="150000"/>
+              </a:lnSpc>
               <a:spcBef>
                 <a:spcPts val="0"/>
               </a:spcBef>
@@ -6702,25 +6695,28 @@
               <a:buClr>
                 <a:schemeClr val="dk1"/>
               </a:buClr>
-              <a:buSzPts val="1800"/>
+              <a:buSzPts val="1900"/>
               <a:buChar char="●"/>
             </a:pPr>
             <a:r>
-              <a:rPr lang="en-GB">
+              <a:rPr lang="en-GB" sz="1900">
                 <a:solidFill>
                   <a:schemeClr val="dk1"/>
                 </a:solidFill>
               </a:rPr>
-              <a:t>Courses are assigned sequentially to time slots.</a:t>
+              <a:t>Courses are assigned sequentially to time slots using nested loops.</a:t>
             </a:r>
-            <a:endParaRPr>
+            <a:endParaRPr sz="1900">
               <a:solidFill>
                 <a:schemeClr val="dk1"/>
               </a:solidFill>
             </a:endParaRPr>
           </a:p>
           <a:p>
-            <a:pPr indent="-342900" lvl="0" marL="457200" rtl="0" algn="l">
+            <a:pPr indent="-349250" lvl="0" marL="457200" rtl="0" algn="l">
+              <a:lnSpc>
+                <a:spcPct val="150000"/>
+              </a:lnSpc>
               <a:spcBef>
                 <a:spcPts val="0"/>
               </a:spcBef>
@@ -6730,40 +6726,18 @@
               <a:buClr>
                 <a:schemeClr val="dk1"/>
               </a:buClr>
-              <a:buSzPts val="1800"/>
+              <a:buSzPts val="1900"/>
               <a:buChar char="●"/>
             </a:pPr>
             <a:r>
-              <a:rPr lang="en-GB">
+              <a:rPr lang="en-GB" sz="1900">
                 <a:solidFill>
                   <a:schemeClr val="dk1"/>
                 </a:solidFill>
               </a:rPr>
-              <a:t>The 12–1 slot is skipped as a break.</a:t>
+              <a:t>The 12–1 slot is skipped as a break while generating the timetable.</a:t>
             </a:r>
-            <a:endParaRPr>
-              <a:solidFill>
-                <a:schemeClr val="dk1"/>
-              </a:solidFill>
-            </a:endParaRPr>
-          </a:p>
-          <a:p>
-            <a:pPr indent="0" lvl="0" marL="0" rtl="0" algn="l">
-              <a:lnSpc>
-                <a:spcPct val="150000"/>
-              </a:lnSpc>
-              <a:spcBef>
-                <a:spcPts val="0"/>
-              </a:spcBef>
-              <a:spcAft>
-                <a:spcPts val="0"/>
-              </a:spcAft>
-              <a:buNone/>
-            </a:pPr>
-            <a:r>
-              <a:t/>
-            </a:r>
-            <a:endParaRPr>
+            <a:endParaRPr sz="1900">
               <a:solidFill>
                 <a:schemeClr val="dk1"/>
               </a:solidFill>
@@ -6895,7 +6869,10 @@
           </a:bodyPr>
           <a:lstStyle/>
           <a:p>
-            <a:pPr indent="-342900" lvl="0" marL="457200" rtl="0" algn="l">
+            <a:pPr indent="-349250" lvl="0" marL="457200" rtl="0" algn="l">
+              <a:lnSpc>
+                <a:spcPct val="150000"/>
+              </a:lnSpc>
               <a:spcBef>
                 <a:spcPts val="0"/>
               </a:spcBef>
@@ -6905,41 +6882,28 @@
               <a:buClr>
                 <a:schemeClr val="dk1"/>
               </a:buClr>
-              <a:buSzPts val="1800"/>
+              <a:buSzPts val="1900"/>
               <a:buChar char="●"/>
             </a:pPr>
             <a:r>
-              <a:rPr lang="en-GB">
+              <a:rPr lang="en-GB" sz="1900">
                 <a:solidFill>
                   <a:schemeClr val="dk1"/>
                 </a:solidFill>
               </a:rPr>
-              <a:t>The program </a:t>
+              <a:t>The program automates timetable generation using C++.</a:t>
             </a:r>
-            <a:r>
-              <a:rPr lang="en-GB">
-                <a:solidFill>
-                  <a:schemeClr val="dk1"/>
-                </a:solidFill>
-              </a:rPr>
-              <a:t>automated</a:t>
-            </a:r>
-            <a:r>
-              <a:rPr lang="en-GB">
-                <a:solidFill>
-                  <a:schemeClr val="dk1"/>
-                </a:solidFill>
-              </a:rPr>
-              <a:t> timetable generation.</a:t>
-            </a:r>
-            <a:endParaRPr>
+            <a:endParaRPr sz="1900">
               <a:solidFill>
                 <a:schemeClr val="dk1"/>
               </a:solidFill>
             </a:endParaRPr>
           </a:p>
           <a:p>
-            <a:pPr indent="-342900" lvl="0" marL="457200" rtl="0" algn="l">
+            <a:pPr indent="-349250" lvl="0" marL="457200" rtl="0" algn="l">
+              <a:lnSpc>
+                <a:spcPct val="150000"/>
+              </a:lnSpc>
               <a:spcBef>
                 <a:spcPts val="0"/>
               </a:spcBef>
@@ -6949,25 +6913,28 @@
               <a:buClr>
                 <a:schemeClr val="dk1"/>
               </a:buClr>
-              <a:buSzPts val="1800"/>
+              <a:buSzPts val="1900"/>
               <a:buChar char="●"/>
             </a:pPr>
             <a:r>
-              <a:rPr lang="en-GB">
+              <a:rPr lang="en-GB" sz="1900">
                 <a:solidFill>
                   <a:schemeClr val="dk1"/>
                 </a:solidFill>
               </a:rPr>
-              <a:t>Reduces manual effort and scheduling errors.</a:t>
+              <a:t>Reduces manual effort and helps organize schedules efficiently.</a:t>
             </a:r>
-            <a:endParaRPr>
+            <a:endParaRPr sz="1900">
               <a:solidFill>
                 <a:schemeClr val="dk1"/>
               </a:solidFill>
             </a:endParaRPr>
           </a:p>
           <a:p>
-            <a:pPr indent="-342900" lvl="0" marL="457200" rtl="0" algn="l">
+            <a:pPr indent="-349250" lvl="0" marL="457200" rtl="0" algn="l">
+              <a:lnSpc>
+                <a:spcPct val="150000"/>
+              </a:lnSpc>
               <a:spcBef>
                 <a:spcPts val="0"/>
               </a:spcBef>
@@ -6977,25 +6944,28 @@
               <a:buClr>
                 <a:schemeClr val="dk1"/>
               </a:buClr>
-              <a:buSzPts val="1800"/>
+              <a:buSzPts val="1900"/>
               <a:buChar char="●"/>
             </a:pPr>
             <a:r>
-              <a:rPr lang="en-GB">
+              <a:rPr lang="en-GB" sz="1900">
                 <a:solidFill>
                   <a:schemeClr val="dk1"/>
                 </a:solidFill>
               </a:rPr>
-              <a:t>Demonstrates use of C++ concepts like arrays, loops, and structures.</a:t>
+              <a:t>Demonstrates C++ concepts like arrays, loops, and 2D arrays.</a:t>
             </a:r>
-            <a:endParaRPr>
+            <a:endParaRPr sz="1900">
               <a:solidFill>
                 <a:schemeClr val="dk1"/>
               </a:solidFill>
             </a:endParaRPr>
           </a:p>
           <a:p>
-            <a:pPr indent="-342900" lvl="0" marL="457200" rtl="0" algn="l">
+            <a:pPr indent="-349250" lvl="0" marL="457200" rtl="0" algn="l">
+              <a:lnSpc>
+                <a:spcPct val="150000"/>
+              </a:lnSpc>
               <a:spcBef>
                 <a:spcPts val="0"/>
               </a:spcBef>
@@ -7005,40 +6975,18 @@
               <a:buClr>
                 <a:schemeClr val="dk1"/>
               </a:buClr>
-              <a:buSzPts val="1800"/>
+              <a:buSzPts val="1900"/>
               <a:buChar char="●"/>
             </a:pPr>
             <a:r>
-              <a:rPr lang="en-GB">
+              <a:rPr lang="en-GB" sz="1900">
                 <a:solidFill>
                   <a:schemeClr val="dk1"/>
                 </a:solidFill>
               </a:rPr>
-              <a:t>Can be expanded with more courses and advanced scheduling features.</a:t>
+              <a:t>The system can be expanded with more courses or advanced scheduling features.</a:t>
             </a:r>
-            <a:endParaRPr>
-              <a:solidFill>
-                <a:schemeClr val="dk1"/>
-              </a:solidFill>
-            </a:endParaRPr>
-          </a:p>
-          <a:p>
-            <a:pPr indent="0" lvl="0" marL="0" rtl="0" algn="l">
-              <a:lnSpc>
-                <a:spcPct val="150000"/>
-              </a:lnSpc>
-              <a:spcBef>
-                <a:spcPts val="0"/>
-              </a:spcBef>
-              <a:spcAft>
-                <a:spcPts val="0"/>
-              </a:spcAft>
-              <a:buNone/>
-            </a:pPr>
-            <a:r>
-              <a:t/>
-            </a:r>
-            <a:endParaRPr>
+            <a:endParaRPr sz="1900">
               <a:solidFill>
                 <a:schemeClr val="dk1"/>
               </a:solidFill>
